--- a/build/session-02/session-02-slides.pptx
+++ b/build/session-02/session-02-slides.pptx
@@ -40,7 +40,6 @@
     <p:sldId id="285" r:id="rId32"/>
     <p:sldId id="286" r:id="rId33"/>
     <p:sldId id="287" r:id="rId34"/>
-    <p:sldId id="288" r:id="rId35"/>
   </p:sldIdLst>
   <p:sldSz cx="12192000" cy="6858000"/>
   <p:notesSz cx="6858000" cy="12192000"/>
@@ -366,53 +365,6 @@
           <a:p>
             <a:r>
               <a:rPr lang="en-US" dirty="0"/>
-              <a:t>Pitfall two from the spec. Do not ban diagrams — they are genuinely how working mathematicians find the statement. Ban them as the final answer. The four-set fact is the argument that lands: ask the room to draw four overlapping circles showing all sixteen regions, let them fail for a minute, then tell them it is impossible with circles. That is a memorable reason to distrust the picture.</a:t>
-            </a:r>
-          </a:p>
-        </p:txBody>
-      </p:sp>
-    </p:spTree>
-  </p:cSld>
-  <p:clrMapOvr>
-    <a:masterClrMapping/>
-  </p:clrMapOvr>
-</p:notes>
-</file>
-
-<file path=ppt/notesSlides/notesSlide15.xml><?xml version="1.0" encoding="utf-8"?>
-<p:notes xmlns:a="http://schemas.openxmlformats.org/drawingml/2006/main" xmlns:r="http://schemas.openxmlformats.org/officeDocument/2006/relationships" xmlns:p="http://schemas.openxmlformats.org/presentationml/2006/main">
-  <p:cSld>
-    <p:spTree>
-      <p:nvGrpSpPr>
-        <p:cNvPr id="1" name=""/>
-        <p:cNvGrpSpPr/>
-        <p:nvPr/>
-      </p:nvGrpSpPr>
-      <p:grpSpPr>
-        <a:xfrm>
-          <a:off x="0" y="0"/>
-          <a:ext cx="0" cy="0"/>
-          <a:chOff x="0" y="0"/>
-          <a:chExt cx="0" cy="0"/>
-        </a:xfrm>
-      </p:grpSpPr>
-      <p:sp>
-        <p:nvSpPr>
-          <p:cNvPr id="2" name="Notes Placeholder 15"/>
-          <p:cNvSpPr>
-            <a:spLocks noGrp="1"/>
-          </p:cNvSpPr>
-          <p:nvPr>
-            <p:ph type="body" idx="1"/>
-          </p:nvPr>
-        </p:nvSpPr>
-        <p:spPr/>
-        <p:txBody>
-          <a:bodyPr/>
-          <a:lstStyle/>
-          <a:p>
-            <a:r>
-              <a:rPr lang="en-US" dirty="0"/>
               <a:t>Answers: $E = \{2,4,6,8,10\}$, $T = \{3,6,9\}$; $E \cap T = \{6\}$, $E \cup T = \{2,3,4,6,8,9,10\}$, $E \setminus T = \{2,4,8,10\}$, $E \triangle T = \{2,3,4,8,9,10\}$, $T^c = \{1,2,4,5,7,8,10\}$. (3) is $E \setminus T$. (4) is "the numbers from 1 to 10 that are neither even nor multiples of three", namely $\{1,5,7\}$ — and that phrasing is De Morgan in English, which is exactly where we go next. Do not tell them that yet; let the next slide land it.</a:t>
             </a:r>
           </a:p>
@@ -426,7 +378,7 @@
 </p:notes>
 </file>
 
-<file path=ppt/notesSlides/notesSlide16.xml><?xml version="1.0" encoding="utf-8"?>
+<file path=ppt/notesSlides/notesSlide15.xml><?xml version="1.0" encoding="utf-8"?>
 <p:notes xmlns:a="http://schemas.openxmlformats.org/drawingml/2006/main" xmlns:r="http://schemas.openxmlformats.org/officeDocument/2006/relationships" xmlns:p="http://schemas.openxmlformats.org/presentationml/2006/main">
   <p:cSld>
     <p:spTree>
@@ -445,7 +397,7 @@
       </p:grpSpPr>
       <p:sp>
         <p:nvSpPr>
-          <p:cNvPr id="2" name="Notes Placeholder 16"/>
+          <p:cNvPr id="2" name="Notes Placeholder 15"/>
           <p:cNvSpPr>
             <a:spLocks noGrp="1"/>
           </p:cNvSpPr>
@@ -473,7 +425,7 @@
 </p:notes>
 </file>
 
-<file path=ppt/notesSlides/notesSlide17.xml><?xml version="1.0" encoding="utf-8"?>
+<file path=ppt/notesSlides/notesSlide16.xml><?xml version="1.0" encoding="utf-8"?>
 <p:notes xmlns:a="http://schemas.openxmlformats.org/drawingml/2006/main" xmlns:r="http://schemas.openxmlformats.org/officeDocument/2006/relationships" xmlns:p="http://schemas.openxmlformats.org/presentationml/2006/main">
   <p:cSld>
     <p:spTree>
@@ -492,7 +444,7 @@
       </p:grpSpPr>
       <p:sp>
         <p:nvSpPr>
-          <p:cNvPr id="2" name="Notes Placeholder 17"/>
+          <p:cNvPr id="2" name="Notes Placeholder 16"/>
           <p:cNvSpPr>
             <a:spLocks noGrp="1"/>
           </p:cNvSpPr>
@@ -520,7 +472,7 @@
 </p:notes>
 </file>
 
-<file path=ppt/notesSlides/notesSlide18.xml><?xml version="1.0" encoding="utf-8"?>
+<file path=ppt/notesSlides/notesSlide17.xml><?xml version="1.0" encoding="utf-8"?>
 <p:notes xmlns:a="http://schemas.openxmlformats.org/drawingml/2006/main" xmlns:r="http://schemas.openxmlformats.org/officeDocument/2006/relationships" xmlns:p="http://schemas.openxmlformats.org/presentationml/2006/main">
   <p:cSld>
     <p:spTree>
@@ -539,7 +491,7 @@
       </p:grpSpPr>
       <p:sp>
         <p:nvSpPr>
-          <p:cNvPr id="2" name="Notes Placeholder 18"/>
+          <p:cNvPr id="2" name="Notes Placeholder 17"/>
           <p:cNvSpPr>
             <a:spLocks noGrp="1"/>
           </p:cNvSpPr>
@@ -567,6 +519,53 @@
 </p:notes>
 </file>
 
+<file path=ppt/notesSlides/notesSlide18.xml><?xml version="1.0" encoding="utf-8"?>
+<p:notes xmlns:a="http://schemas.openxmlformats.org/drawingml/2006/main" xmlns:r="http://schemas.openxmlformats.org/officeDocument/2006/relationships" xmlns:p="http://schemas.openxmlformats.org/presentationml/2006/main">
+  <p:cSld>
+    <p:spTree>
+      <p:nvGrpSpPr>
+        <p:cNvPr id="1" name=""/>
+        <p:cNvGrpSpPr/>
+        <p:nvPr/>
+      </p:nvGrpSpPr>
+      <p:grpSpPr>
+        <a:xfrm>
+          <a:off x="0" y="0"/>
+          <a:ext cx="0" cy="0"/>
+          <a:chOff x="0" y="0"/>
+          <a:chExt cx="0" cy="0"/>
+        </a:xfrm>
+      </p:grpSpPr>
+      <p:sp>
+        <p:nvSpPr>
+          <p:cNvPr id="2" name="Notes Placeholder 18"/>
+          <p:cNvSpPr>
+            <a:spLocks noGrp="1"/>
+          </p:cNvSpPr>
+          <p:nvPr>
+            <p:ph type="body" idx="1"/>
+          </p:nvPr>
+        </p:nvSpPr>
+        <p:spPr/>
+        <p:txBody>
+          <a:bodyPr/>
+          <a:lstStyle/>
+          <a:p>
+            <a:r>
+              <a:rPr lang="en-US" dirty="0"/>
+              <a:t>Board example one from the course spec. Do this half live and slowly, in full sentences, and leave it on the board when you turn the slide — the second half is easier to follow with this still visible. The step students skip is the negation: "not (P and Q)" becomes "not P or not Q".</a:t>
+            </a:r>
+          </a:p>
+        </p:txBody>
+      </p:sp>
+    </p:spTree>
+  </p:cSld>
+  <p:clrMapOvr>
+    <a:masterClrMapping/>
+  </p:clrMapOvr>
+</p:notes>
+</file>
+
 <file path=ppt/notesSlides/notesSlide19.xml><?xml version="1.0" encoding="utf-8"?>
 <p:notes xmlns:a="http://schemas.openxmlformats.org/drawingml/2006/main" xmlns:r="http://schemas.openxmlformats.org/officeDocument/2006/relationships" xmlns:p="http://schemas.openxmlformats.org/presentationml/2006/main">
   <p:cSld>
@@ -601,7 +600,7 @@
           <a:p>
             <a:r>
               <a:rPr lang="en-US" dirty="0"/>
-              <a:t>Board example one from the course spec. Do this half live and slowly, in full sentences, and leave it on the board when you turn the slide — the second half is easier to follow with this still visible. The step students skip is the negation: "not (P and Q)" becomes "not P or not Q".</a:t>
+              <a:t>Ask the room why the case split is forced before you write it: a union hypothesis tells you $x$ is in at least one part, but not which, so a proof that assumes it is in $A \setminus B$ has covered only half the possibilities. Then close the argument explicitly — both inclusions shown, therefore equal — because students routinely prove both halves and forget to say the conclusion.</a:t>
             </a:r>
           </a:p>
         </p:txBody>
@@ -695,53 +694,6 @@
           <a:p>
             <a:r>
               <a:rPr lang="en-US" dirty="0"/>
-              <a:t>Ask the room why the case split is forced before you write it: a union hypothesis tells you $x$ is in at least one part, but not which, so a proof that assumes it is in $A \setminus B$ has covered only half the possibilities. Then close the argument explicitly — both inclusions shown, therefore equal — because students routinely prove both halves and forget to say the conclusion.</a:t>
-            </a:r>
-          </a:p>
-        </p:txBody>
-      </p:sp>
-    </p:spTree>
-  </p:cSld>
-  <p:clrMapOvr>
-    <a:masterClrMapping/>
-  </p:clrMapOvr>
-</p:notes>
-</file>
-
-<file path=ppt/notesSlides/notesSlide21.xml><?xml version="1.0" encoding="utf-8"?>
-<p:notes xmlns:a="http://schemas.openxmlformats.org/drawingml/2006/main" xmlns:r="http://schemas.openxmlformats.org/officeDocument/2006/relationships" xmlns:p="http://schemas.openxmlformats.org/presentationml/2006/main">
-  <p:cSld>
-    <p:spTree>
-      <p:nvGrpSpPr>
-        <p:cNvPr id="1" name=""/>
-        <p:cNvGrpSpPr/>
-        <p:nvPr/>
-      </p:nvGrpSpPr>
-      <p:grpSpPr>
-        <a:xfrm>
-          <a:off x="0" y="0"/>
-          <a:ext cx="0" cy="0"/>
-          <a:chOff x="0" y="0"/>
-          <a:chExt cx="0" cy="0"/>
-        </a:xfrm>
-      </p:grpSpPr>
-      <p:sp>
-        <p:nvSpPr>
-          <p:cNvPr id="2" name="Notes Placeholder 21"/>
-          <p:cNvSpPr>
-            <a:spLocks noGrp="1"/>
-          </p:cNvSpPr>
-          <p:nvPr>
-            <p:ph type="body" idx="1"/>
-          </p:nvPr>
-        </p:nvSpPr>
-        <p:spPr/>
-        <p:txBody>
-          <a:bodyPr/>
-          <a:lstStyle/>
-          <a:p>
-            <a:r>
-              <a:rPr lang="en-US" dirty="0"/>
               <a:t>Call back to Activity 2 explicitly: they already proved an instance of this in English without knowing its name. Prove the first law on the board and set the second as a thirty-second exercise — it is the same argument with the connectives swapped, and noticing that is worth more than watching you do it. De Morgan returns in Session 5 for quantifiers and in Session 10 for logic; flag that.</a:t>
             </a:r>
           </a:p>
@@ -755,7 +707,7 @@
 </p:notes>
 </file>
 
-<file path=ppt/notesSlides/notesSlide22.xml><?xml version="1.0" encoding="utf-8"?>
+<file path=ppt/notesSlides/notesSlide21.xml><?xml version="1.0" encoding="utf-8"?>
 <p:notes xmlns:a="http://schemas.openxmlformats.org/drawingml/2006/main" xmlns:r="http://schemas.openxmlformats.org/officeDocument/2006/relationships" xmlns:p="http://schemas.openxmlformats.org/presentationml/2006/main">
   <p:cSld>
     <p:spTree>
@@ -774,7 +726,7 @@
       </p:grpSpPr>
       <p:sp>
         <p:nvSpPr>
-          <p:cNvPr id="2" name="Notes Placeholder 22"/>
+          <p:cNvPr id="2" name="Notes Placeholder 21"/>
           <p:cNvSpPr>
             <a:spLocks noGrp="1"/>
           </p:cNvSpPr>
@@ -802,7 +754,7 @@
 </p:notes>
 </file>
 
-<file path=ppt/notesSlides/notesSlide23.xml><?xml version="1.0" encoding="utf-8"?>
+<file path=ppt/notesSlides/notesSlide22.xml><?xml version="1.0" encoding="utf-8"?>
 <p:notes xmlns:a="http://schemas.openxmlformats.org/drawingml/2006/main" xmlns:r="http://schemas.openxmlformats.org/officeDocument/2006/relationships" xmlns:p="http://schemas.openxmlformats.org/presentationml/2006/main">
   <p:cSld>
     <p:spTree>
@@ -821,7 +773,7 @@
       </p:grpSpPr>
       <p:sp>
         <p:nvSpPr>
-          <p:cNvPr id="2" name="Notes Placeholder 23"/>
+          <p:cNvPr id="2" name="Notes Placeholder 22"/>
           <p:cNvSpPr>
             <a:spLocks noGrp="1"/>
           </p:cNvSpPr>
@@ -849,7 +801,7 @@
 </p:notes>
 </file>
 
-<file path=ppt/notesSlides/notesSlide24.xml><?xml version="1.0" encoding="utf-8"?>
+<file path=ppt/notesSlides/notesSlide23.xml><?xml version="1.0" encoding="utf-8"?>
 <p:notes xmlns:a="http://schemas.openxmlformats.org/drawingml/2006/main" xmlns:r="http://schemas.openxmlformats.org/officeDocument/2006/relationships" xmlns:p="http://schemas.openxmlformats.org/presentationml/2006/main">
   <p:cSld>
     <p:spTree>
@@ -868,7 +820,7 @@
       </p:grpSpPr>
       <p:sp>
         <p:nvSpPr>
-          <p:cNvPr id="2" name="Notes Placeholder 24"/>
+          <p:cNvPr id="2" name="Notes Placeholder 23"/>
           <p:cNvSpPr>
             <a:spLocks noGrp="1"/>
           </p:cNvSpPr>
@@ -896,7 +848,7 @@
 </p:notes>
 </file>
 
-<file path=ppt/notesSlides/notesSlide25.xml><?xml version="1.0" encoding="utf-8"?>
+<file path=ppt/notesSlides/notesSlide24.xml><?xml version="1.0" encoding="utf-8"?>
 <p:notes xmlns:a="http://schemas.openxmlformats.org/drawingml/2006/main" xmlns:r="http://schemas.openxmlformats.org/officeDocument/2006/relationships" xmlns:p="http://schemas.openxmlformats.org/presentationml/2006/main">
   <p:cSld>
     <p:spTree>
@@ -915,7 +867,7 @@
       </p:grpSpPr>
       <p:sp>
         <p:nvSpPr>
-          <p:cNvPr id="2" name="Notes Placeholder 25"/>
+          <p:cNvPr id="2" name="Notes Placeholder 24"/>
           <p:cNvSpPr>
             <a:spLocks noGrp="1"/>
           </p:cNvSpPr>
@@ -943,7 +895,7 @@
 </p:notes>
 </file>
 
-<file path=ppt/notesSlides/notesSlide26.xml><?xml version="1.0" encoding="utf-8"?>
+<file path=ppt/notesSlides/notesSlide25.xml><?xml version="1.0" encoding="utf-8"?>
 <p:notes xmlns:a="http://schemas.openxmlformats.org/drawingml/2006/main" xmlns:r="http://schemas.openxmlformats.org/officeDocument/2006/relationships" xmlns:p="http://schemas.openxmlformats.org/presentationml/2006/main">
   <p:cSld>
     <p:spTree>
@@ -962,7 +914,7 @@
       </p:grpSpPr>
       <p:sp>
         <p:nvSpPr>
-          <p:cNvPr id="2" name="Notes Placeholder 26"/>
+          <p:cNvPr id="2" name="Notes Placeholder 25"/>
           <p:cNvSpPr>
             <a:spLocks noGrp="1"/>
           </p:cNvSpPr>
@@ -990,7 +942,7 @@
 </p:notes>
 </file>
 
-<file path=ppt/notesSlides/notesSlide27.xml><?xml version="1.0" encoding="utf-8"?>
+<file path=ppt/notesSlides/notesSlide26.xml><?xml version="1.0" encoding="utf-8"?>
 <p:notes xmlns:a="http://schemas.openxmlformats.org/drawingml/2006/main" xmlns:r="http://schemas.openxmlformats.org/officeDocument/2006/relationships" xmlns:p="http://schemas.openxmlformats.org/presentationml/2006/main">
   <p:cSld>
     <p:spTree>
@@ -1009,7 +961,7 @@
       </p:grpSpPr>
       <p:sp>
         <p:nvSpPr>
-          <p:cNvPr id="2" name="Notes Placeholder 27"/>
+          <p:cNvPr id="2" name="Notes Placeholder 26"/>
           <p:cNvSpPr>
             <a:spLocks noGrp="1"/>
           </p:cNvSpPr>
@@ -1037,7 +989,7 @@
 </p:notes>
 </file>
 
-<file path=ppt/notesSlides/notesSlide28.xml><?xml version="1.0" encoding="utf-8"?>
+<file path=ppt/notesSlides/notesSlide27.xml><?xml version="1.0" encoding="utf-8"?>
 <p:notes xmlns:a="http://schemas.openxmlformats.org/drawingml/2006/main" xmlns:r="http://schemas.openxmlformats.org/officeDocument/2006/relationships" xmlns:p="http://schemas.openxmlformats.org/presentationml/2006/main">
   <p:cSld>
     <p:spTree>
@@ -1056,7 +1008,7 @@
       </p:grpSpPr>
       <p:sp>
         <p:nvSpPr>
-          <p:cNvPr id="2" name="Notes Placeholder 28"/>
+          <p:cNvPr id="2" name="Notes Placeholder 27"/>
           <p:cNvSpPr>
             <a:spLocks noGrp="1"/>
           </p:cNvSpPr>
@@ -1084,6 +1036,53 @@
 </p:notes>
 </file>
 
+<file path=ppt/notesSlides/notesSlide28.xml><?xml version="1.0" encoding="utf-8"?>
+<p:notes xmlns:a="http://schemas.openxmlformats.org/drawingml/2006/main" xmlns:r="http://schemas.openxmlformats.org/officeDocument/2006/relationships" xmlns:p="http://schemas.openxmlformats.org/presentationml/2006/main">
+  <p:cSld>
+    <p:spTree>
+      <p:nvGrpSpPr>
+        <p:cNvPr id="1" name=""/>
+        <p:cNvGrpSpPr/>
+        <p:nvPr/>
+      </p:nvGrpSpPr>
+      <p:grpSpPr>
+        <a:xfrm>
+          <a:off x="0" y="0"/>
+          <a:ext cx="0" cy="0"/>
+          <a:chOff x="0" y="0"/>
+          <a:chExt cx="0" cy="0"/>
+        </a:xfrm>
+      </p:grpSpPr>
+      <p:sp>
+        <p:nvSpPr>
+          <p:cNvPr id="2" name="Notes Placeholder 28"/>
+          <p:cNvSpPr>
+            <a:spLocks noGrp="1"/>
+          </p:cNvSpPr>
+          <p:nvPr>
+            <p:ph type="body" idx="1"/>
+          </p:nvPr>
+        </p:nvSpPr>
+        <p:spPr/>
+        <p:txBody>
+          <a:bodyPr/>
+          <a:lstStyle/>
+          <a:p>
+            <a:r>
+              <a:rPr lang="en-US" dirty="0"/>
+              <a:t>(1) Not equal: $(1,a) \neq (a,1)$. (2) $\mathcal{P}(A)$ has 4 elements, so $\mathcal{P}(\mathcal{P}(A))$ has $2^4 = 16$ — several pairs will try to list it and lose five minutes; let one of them, it teaches the point about growth. (3) is TRUE for all sets. (4) is FALSE: with $A=\{1\}$, $B=\{2\}$, the set $\{1,2\}$ is in the left but in neither part of the right. Only $\supseteq$ holds. That asymmetry between (3) and (4) is the best thing in this activity — make sure it gets said out loud.</a:t>
+            </a:r>
+          </a:p>
+        </p:txBody>
+      </p:sp>
+    </p:spTree>
+  </p:cSld>
+  <p:clrMapOvr>
+    <a:masterClrMapping/>
+  </p:clrMapOvr>
+</p:notes>
+</file>
+
 <file path=ppt/notesSlides/notesSlide29.xml><?xml version="1.0" encoding="utf-8"?>
 <p:notes xmlns:a="http://schemas.openxmlformats.org/drawingml/2006/main" xmlns:r="http://schemas.openxmlformats.org/officeDocument/2006/relationships" xmlns:p="http://schemas.openxmlformats.org/presentationml/2006/main">
   <p:cSld>
@@ -1118,7 +1117,7 @@
           <a:p>
             <a:r>
               <a:rPr lang="en-US" dirty="0"/>
-              <a:t>(1) Not equal: $(1,a) \neq (a,1)$. (2) $\mathcal{P}(A)$ has 4 elements, so $\mathcal{P}(\mathcal{P}(A))$ has $2^4 = 16$ — several pairs will try to list it and lose five minutes; let one of them, it teaches the point about growth. (3) is TRUE for all sets. (4) is FALSE: with $A=\{1\}$, $B=\{2\}$, the set $\{1,2\}$ is in the left but in neither part of the right. Only $\supseteq$ holds. That asymmetry between (3) and (4) is the best thing in this activity — make sure it gets said out loud.</a:t>
+              <a:t>The asymmetry is the whole point, so make somebody articulate it: "$X \subseteq A \cap B$" splits into an and , which matches intersection exactly; "$X \subseteq A \cup B$" does not split into an or, because a subset of the union may straddle both sets without sitting inside either. Item 2 is worth mentioning again — several pairs will have tried to list all 16.</a:t>
             </a:r>
           </a:p>
         </p:txBody>
@@ -1212,53 +1211,6 @@
           <a:p>
             <a:r>
               <a:rPr lang="en-US" dirty="0"/>
-              <a:t>The asymmetry is the whole point, so make somebody articulate it: "$X \subseteq A \cap B$" splits into an and , which matches intersection exactly; "$X \subseteq A \cup B$" does not split into an or, because a subset of the union may straddle both sets without sitting inside either. Item 2 is worth mentioning again — several pairs will have tried to list all 16.</a:t>
-            </a:r>
-          </a:p>
-        </p:txBody>
-      </p:sp>
-    </p:spTree>
-  </p:cSld>
-  <p:clrMapOvr>
-    <a:masterClrMapping/>
-  </p:clrMapOvr>
-</p:notes>
-</file>
-
-<file path=ppt/notesSlides/notesSlide31.xml><?xml version="1.0" encoding="utf-8"?>
-<p:notes xmlns:a="http://schemas.openxmlformats.org/drawingml/2006/main" xmlns:r="http://schemas.openxmlformats.org/officeDocument/2006/relationships" xmlns:p="http://schemas.openxmlformats.org/presentationml/2006/main">
-  <p:cSld>
-    <p:spTree>
-      <p:nvGrpSpPr>
-        <p:cNvPr id="1" name=""/>
-        <p:cNvGrpSpPr/>
-        <p:nvPr/>
-      </p:nvGrpSpPr>
-      <p:grpSpPr>
-        <a:xfrm>
-          <a:off x="0" y="0"/>
-          <a:ext cx="0" cy="0"/>
-          <a:chOff x="0" y="0"/>
-          <a:chExt cx="0" cy="0"/>
-        </a:xfrm>
-      </p:grpSpPr>
-      <p:sp>
-        <p:nvSpPr>
-          <p:cNvPr id="2" name="Notes Placeholder 31"/>
-          <p:cNvSpPr>
-            <a:spLocks noGrp="1"/>
-          </p:cNvSpPr>
-          <p:nvPr>
-            <p:ph type="body" idx="1"/>
-          </p:nvPr>
-        </p:nvSpPr>
-        <p:spPr/>
-        <p:txBody>
-          <a:bodyPr/>
-          <a:lstStyle/>
-          <a:p>
-            <a:r>
-              <a:rPr lang="en-US" dirty="0"/>
               <a:t>All three are the spec's pitfalls, and each has already appeared today — call back to where. The unifying fix in the note box is the sentence to leave them with: when stuck, unfold the definition and talk about an arbitrary element. Two minutes; they are tired by now and this is a checklist, not new material.</a:t>
             </a:r>
           </a:p>
@@ -1272,7 +1224,7 @@
 </p:notes>
 </file>
 
-<file path=ppt/notesSlides/notesSlide32.xml><?xml version="1.0" encoding="utf-8"?>
+<file path=ppt/notesSlides/notesSlide31.xml><?xml version="1.0" encoding="utf-8"?>
 <p:notes xmlns:a="http://schemas.openxmlformats.org/drawingml/2006/main" xmlns:r="http://schemas.openxmlformats.org/officeDocument/2006/relationships" xmlns:p="http://schemas.openxmlformats.org/presentationml/2006/main">
   <p:cSld>
     <p:spTree>
@@ -1291,7 +1243,7 @@
       </p:grpSpPr>
       <p:sp>
         <p:nvSpPr>
-          <p:cNvPr id="2" name="Notes Placeholder 32"/>
+          <p:cNvPr id="2" name="Notes Placeholder 31"/>
           <p:cNvSpPr>
             <a:spLocks noGrp="1"/>
           </p:cNvSpPr>
@@ -1319,7 +1271,7 @@
 </p:notes>
 </file>
 
-<file path=ppt/notesSlides/notesSlide33.xml><?xml version="1.0" encoding="utf-8"?>
+<file path=ppt/notesSlides/notesSlide32.xml><?xml version="1.0" encoding="utf-8"?>
 <p:notes xmlns:a="http://schemas.openxmlformats.org/drawingml/2006/main" xmlns:r="http://schemas.openxmlformats.org/officeDocument/2006/relationships" xmlns:p="http://schemas.openxmlformats.org/presentationml/2006/main">
   <p:cSld>
     <p:spTree>
@@ -1338,7 +1290,7 @@
       </p:grpSpPr>
       <p:sp>
         <p:nvSpPr>
-          <p:cNvPr id="2" name="Notes Placeholder 33"/>
+          <p:cNvPr id="2" name="Notes Placeholder 32"/>
           <p:cNvSpPr>
             <a:spLocks noGrp="1"/>
           </p:cNvSpPr>
@@ -2952,55 +2904,6 @@
       <p:pic>
         <p:nvPicPr>
           <p:cNvPr id="2" name="Slide 32"/>
-          <p:cNvPicPr>
-            <a:picLocks noChangeAspect="1"/>
-          </p:cNvPicPr>
-          <p:nvPr/>
-        </p:nvPicPr>
-        <p:blipFill>
-          <a:blip r:embed="rId2"/>
-          <a:stretch>
-            <a:fillRect/>
-          </a:stretch>
-        </p:blipFill>
-        <p:spPr>
-          <a:xfrm>
-            <a:off x="0" y="0"/>
-            <a:ext cx="12192000" cy="6858000"/>
-          </a:xfrm>
-          <a:prstGeom prst="rect">
-            <a:avLst/>
-          </a:prstGeom>
-        </p:spPr>
-      </p:pic>
-    </p:spTree>
-  </p:cSld>
-  <p:clrMapOvr>
-    <a:masterClrMapping/>
-  </p:clrMapOvr>
-</p:sld>
-</file>
-
-<file path=ppt/slides/slide33.xml><?xml version="1.0" encoding="utf-8"?>
-<p:sld xmlns:a="http://schemas.openxmlformats.org/drawingml/2006/main" xmlns:r="http://schemas.openxmlformats.org/officeDocument/2006/relationships" xmlns:p="http://schemas.openxmlformats.org/presentationml/2006/main">
-  <p:cSld>
-    <p:spTree>
-      <p:nvGrpSpPr>
-        <p:cNvPr id="1" name=""/>
-        <p:cNvGrpSpPr/>
-        <p:nvPr/>
-      </p:nvGrpSpPr>
-      <p:grpSpPr>
-        <a:xfrm>
-          <a:off x="0" y="0"/>
-          <a:ext cx="0" cy="0"/>
-          <a:chOff x="0" y="0"/>
-          <a:chExt cx="0" cy="0"/>
-        </a:xfrm>
-      </p:grpSpPr>
-      <p:pic>
-        <p:nvPicPr>
-          <p:cNvPr id="2" name="Slide 33"/>
           <p:cNvPicPr>
             <a:picLocks noChangeAspect="1"/>
           </p:cNvPicPr>
